--- a/slides/PBL-orientation.pptx
+++ b/slides/PBL-orientation.pptx
@@ -2697,7 +2697,7 @@
                 <a:ea typeface="Consolas" pitchFamily="34" charset="-122"/>
                 <a:cs typeface="Consolas" pitchFamily="34" charset="-120"/>
               </a:rPr>
-              <a:t>org-draft.vercel.app</a:t>
+              <a:t>org.deanzapbl.com</a:t>
             </a:r>
             <a:endParaRPr lang="en-US" sz="1100" dirty="0"/>
           </a:p>
@@ -5800,7 +5800,7 @@
                 <a:ea typeface="Calibri" pitchFamily="34" charset="-122"/>
                 <a:cs typeface="Calibri" pitchFamily="34" charset="-120"/>
               </a:rPr>
-              <a:t>Name the divisions and ranks, create the sign-up form, hand out the join code.</a:t>
+              <a:t>Name the divisions and ranks, create the sign-up form, share the site.</a:t>
             </a:r>
             <a:endParaRPr lang="en-US" sz="1500" dirty="0"/>
           </a:p>
@@ -6784,7 +6784,7 @@
                 <a:ea typeface="Calibri Light" pitchFamily="34" charset="-122"/>
                 <a:cs typeface="Calibri Light" pitchFamily="34" charset="-120"/>
               </a:rPr>
-              <a:t>org-draft.vercel.app</a:t>
+              <a:t>org.deanzapbl.com</a:t>
             </a:r>
             <a:endParaRPr lang="en-US" sz="4800" dirty="0"/>
           </a:p>
@@ -6846,7 +6846,7 @@
                 <a:ea typeface="Calibri" pitchFamily="34" charset="-122"/>
                 <a:cs typeface="Calibri" pitchFamily="34" charset="-120"/>
               </a:rPr>
-              <a:t>Sign in, join with the code, fill in the form. Then find your Org under Teams and see where it stands.</a:t>
+              <a:t>Sign in, pick De Anza PBL, send the sign-up form. Then find your Org under Teams and see where it stands.</a:t>
             </a:r>
             <a:endParaRPr lang="en-US" sz="1700" dirty="0"/>
           </a:p>
@@ -9095,7 +9095,7 @@
                 <a:ea typeface="Calibri" pitchFamily="34" charset="-122"/>
                 <a:cs typeface="Calibri" pitchFamily="34" charset="-120"/>
               </a:rPr>
-              <a:t>Pick it from the list and enter the join code your officers gave you.</a:t>
+              <a:t>Pick it from the list, then send the sign-up form. The rest opens once it is in.</a:t>
             </a:r>
             <a:endParaRPr lang="en-US" sz="1450" dirty="0"/>
           </a:p>

--- a/slides/PBL-orientation.pptx
+++ b/slides/PBL-orientation.pptx
@@ -5800,7 +5800,7 @@
                 <a:ea typeface="Calibri" pitchFamily="34" charset="-122"/>
                 <a:cs typeface="Calibri" pitchFamily="34" charset="-120"/>
               </a:rPr>
-              <a:t>Name the divisions and ranks, create the sign-up form, share the site.</a:t>
+              <a:t>Name the divisions and ranks, create the sign-up form, hand out the join code.</a:t>
             </a:r>
             <a:endParaRPr lang="en-US" sz="1500" dirty="0"/>
           </a:p>
@@ -6846,7 +6846,7 @@
                 <a:ea typeface="Calibri" pitchFamily="34" charset="-122"/>
                 <a:cs typeface="Calibri" pitchFamily="34" charset="-120"/>
               </a:rPr>
-              <a:t>Sign in, pick De Anza PBL, send the sign-up form. Then find your Org under Teams and see where it stands.</a:t>
+              <a:t>Sign in, join with the code, send the sign-up form. Then find your Org under Teams and see where it stands.</a:t>
             </a:r>
             <a:endParaRPr lang="en-US" sz="1700" dirty="0"/>
           </a:p>
@@ -9095,7 +9095,7 @@
                 <a:ea typeface="Calibri" pitchFamily="34" charset="-122"/>
                 <a:cs typeface="Calibri" pitchFamily="34" charset="-120"/>
               </a:rPr>
-              <a:t>Pick it from the list, then send the sign-up form. The rest opens once it is in.</a:t>
+              <a:t>Pick it from the list and enter the join code your officers gave you.</a:t>
             </a:r>
             <a:endParaRPr lang="en-US" sz="1450" dirty="0"/>
           </a:p>
